--- a/coastal-19-listing-highlight.pptx
+++ b/coastal-19-listing-highlight.pptx
@@ -3316,7 +3316,7 @@
         </p:nvSpPr>
         <p:spPr>
           <a:xfrm>
-            <a:off x="762000" y="11325225"/>
+            <a:off x="762000" y="11639550"/>
             <a:ext cx="8763000" cy="9525"/>
           </a:xfrm>
           <a:prstGeom prst="rect">
@@ -3360,7 +3360,7 @@
         </p:nvSpPr>
         <p:spPr>
           <a:xfrm>
-            <a:off x="762000" y="11887200"/>
+            <a:off x="762000" y="12430125"/>
             <a:ext cx="8763000" cy="9525"/>
           </a:xfrm>
           <a:prstGeom prst="rect">
@@ -3404,7 +3404,7 @@
         </p:nvSpPr>
         <p:spPr>
           <a:xfrm>
-            <a:off x="762000" y="12449175"/>
+            <a:off x="762000" y="13220700"/>
             <a:ext cx="8763000" cy="9525"/>
           </a:xfrm>
           <a:prstGeom prst="rect">
@@ -3448,8 +3448,8 @@
         </p:nvSpPr>
         <p:spPr>
           <a:xfrm>
-            <a:off x="762000" y="15840075"/>
-            <a:ext cx="2621459" cy="9525"/>
+            <a:off x="762000" y="15621000"/>
+            <a:ext cx="3570982" cy="9525"/>
           </a:xfrm>
           <a:prstGeom prst="rect">
             <a:avLst/>
@@ -3493,7 +3493,7 @@
         <p:spPr>
           <a:xfrm>
             <a:off x="762000" y="16373475"/>
-            <a:ext cx="2621459" cy="9525"/>
+            <a:ext cx="3570982" cy="9525"/>
           </a:xfrm>
           <a:prstGeom prst="rect">
             <a:avLst/>
@@ -3536,8 +3536,8 @@
         </p:nvSpPr>
         <p:spPr>
           <a:xfrm>
-            <a:off x="762000" y="15840075"/>
-            <a:ext cx="9525" cy="542925"/>
+            <a:off x="762000" y="15621000"/>
+            <a:ext cx="9525" cy="762000"/>
           </a:xfrm>
           <a:prstGeom prst="rect">
             <a:avLst/>
@@ -3580,8 +3580,8 @@
         </p:nvSpPr>
         <p:spPr>
           <a:xfrm>
-            <a:off x="3373934" y="15840075"/>
-            <a:ext cx="9525" cy="542925"/>
+            <a:off x="4323457" y="15621000"/>
+            <a:ext cx="9525" cy="762000"/>
           </a:xfrm>
           <a:prstGeom prst="rect">
             <a:avLst/>
@@ -3624,7 +3624,7 @@
         </p:nvSpPr>
         <p:spPr>
           <a:xfrm>
-            <a:off x="1041493" y="16057656"/>
+            <a:off x="1079593" y="15948118"/>
             <a:ext cx="107763" cy="107763"/>
           </a:xfrm>
           <a:prstGeom prst="rect">
@@ -3707,8 +3707,8 @@
         </p:nvSpPr>
         <p:spPr>
           <a:xfrm>
-            <a:off x="7207300" y="938212"/>
-            <a:ext cx="4089321" cy="104775"/>
+            <a:off x="5902077" y="904875"/>
+            <a:ext cx="6177677" cy="171450"/>
           </a:xfrm>
           <a:prstGeom prst="rect">
             <a:avLst/>
@@ -3721,7 +3721,7 @@
           <a:p>
             <a:pPr algn="l"/>
             <a:r>
-              <a:rPr sz="750" i="0" b="1" spc="240">
+              <a:rPr sz="1200" i="0" b="1" spc="360">
                 <a:solidFill>
                   <a:srgbClr val="F3EEE7"/>
                 </a:solidFill>
@@ -3743,7 +3743,7 @@
         <p:spPr>
           <a:xfrm>
             <a:off x="762000" y="9620250"/>
-            <a:ext cx="14401800" cy="142875"/>
+            <a:ext cx="14401800" cy="228600"/>
           </a:xfrm>
           <a:prstGeom prst="rect">
             <a:avLst/>
@@ -3756,7 +3756,7 @@
           <a:p>
             <a:pPr algn="l"/>
             <a:r>
-              <a:rPr sz="975" i="0" b="1" spc="351">
+              <a:rPr sz="1575" i="0" b="1" spc="472">
                 <a:solidFill>
                   <a:srgbClr val="A98BA6"/>
                 </a:solidFill>
@@ -3777,7 +3777,7 @@
         </p:nvSpPr>
         <p:spPr>
           <a:xfrm>
-            <a:off x="762000" y="9915525"/>
+            <a:off x="762000" y="10001250"/>
             <a:ext cx="14401800" cy="609600"/>
           </a:xfrm>
           <a:prstGeom prst="rect">
@@ -3812,8 +3812,8 @@
         </p:nvSpPr>
         <p:spPr>
           <a:xfrm>
-            <a:off x="762000" y="10925175"/>
-            <a:ext cx="716280" cy="247650"/>
+            <a:off x="762000" y="11068050"/>
+            <a:ext cx="899160" cy="361950"/>
           </a:xfrm>
           <a:prstGeom prst="rect">
             <a:avLst/>
@@ -3826,7 +3826,7 @@
           <a:p>
             <a:pPr algn="l"/>
             <a:r>
-              <a:rPr sz="1650" i="1" b="0">
+              <a:rPr sz="2550" i="1" b="0">
                 <a:solidFill>
                   <a:srgbClr val="A98BA6"/>
                 </a:solidFill>
@@ -3847,8 +3847,8 @@
         </p:nvSpPr>
         <p:spPr>
           <a:xfrm>
-            <a:off x="1123950" y="10925175"/>
-            <a:ext cx="6327934" cy="247650"/>
+            <a:off x="1257300" y="11068050"/>
+            <a:ext cx="8706564" cy="361950"/>
           </a:xfrm>
           <a:prstGeom prst="rect">
             <a:avLst/>
@@ -3861,7 +3861,7 @@
           <a:p>
             <a:pPr algn="l"/>
             <a:r>
-              <a:rPr sz="1500" i="0" b="0">
+              <a:rPr sz="2100" i="0" b="0">
                 <a:solidFill>
                   <a:srgbClr val="F3EEE7"/>
                 </a:solidFill>
@@ -3882,8 +3882,8 @@
         </p:nvSpPr>
         <p:spPr>
           <a:xfrm>
-            <a:off x="762000" y="11487150"/>
-            <a:ext cx="716280" cy="247650"/>
+            <a:off x="762000" y="11858625"/>
+            <a:ext cx="899160" cy="361950"/>
           </a:xfrm>
           <a:prstGeom prst="rect">
             <a:avLst/>
@@ -3896,7 +3896,7 @@
           <a:p>
             <a:pPr algn="l"/>
             <a:r>
-              <a:rPr sz="1650" i="1" b="0">
+              <a:rPr sz="2550" i="1" b="0">
                 <a:solidFill>
                   <a:srgbClr val="A98BA6"/>
                 </a:solidFill>
@@ -3917,8 +3917,8 @@
         </p:nvSpPr>
         <p:spPr>
           <a:xfrm>
-            <a:off x="1123950" y="11487150"/>
-            <a:ext cx="5293995" cy="247650"/>
+            <a:off x="1257300" y="11858625"/>
+            <a:ext cx="7259241" cy="361950"/>
           </a:xfrm>
           <a:prstGeom prst="rect">
             <a:avLst/>
@@ -3931,7 +3931,7 @@
           <a:p>
             <a:pPr algn="l"/>
             <a:r>
-              <a:rPr sz="1500" i="0" b="0">
+              <a:rPr sz="2100" i="0" b="0">
                 <a:solidFill>
                   <a:srgbClr val="F3EEE7"/>
                 </a:solidFill>
@@ -3952,8 +3952,8 @@
         </p:nvSpPr>
         <p:spPr>
           <a:xfrm>
-            <a:off x="762000" y="12049125"/>
-            <a:ext cx="716280" cy="247650"/>
+            <a:off x="762000" y="12649200"/>
+            <a:ext cx="899160" cy="361950"/>
           </a:xfrm>
           <a:prstGeom prst="rect">
             <a:avLst/>
@@ -3966,7 +3966,7 @@
           <a:p>
             <a:pPr algn="l"/>
             <a:r>
-              <a:rPr sz="1650" i="1" b="0">
+              <a:rPr sz="2550" i="1" b="0">
                 <a:solidFill>
                   <a:srgbClr val="A98BA6"/>
                 </a:solidFill>
@@ -3987,8 +3987,8 @@
         </p:nvSpPr>
         <p:spPr>
           <a:xfrm>
-            <a:off x="1123950" y="12049125"/>
-            <a:ext cx="5560219" cy="247650"/>
+            <a:off x="1257300" y="12649200"/>
+            <a:ext cx="7631906" cy="361950"/>
           </a:xfrm>
           <a:prstGeom prst="rect">
             <a:avLst/>
@@ -4001,7 +4001,7 @@
           <a:p>
             <a:pPr algn="l"/>
             <a:r>
-              <a:rPr sz="1500" i="0" b="0">
+              <a:rPr sz="2100" i="0" b="0">
                 <a:solidFill>
                   <a:srgbClr val="F3EEE7"/>
                 </a:solidFill>
@@ -4022,8 +4022,8 @@
         </p:nvSpPr>
         <p:spPr>
           <a:xfrm>
-            <a:off x="1266825" y="16035338"/>
-            <a:ext cx="2883694" cy="152400"/>
+            <a:off x="1323975" y="15878175"/>
+            <a:ext cx="4220051" cy="247650"/>
           </a:xfrm>
           <a:prstGeom prst="rect">
             <a:avLst/>
@@ -4036,7 +4036,7 @@
           <a:p>
             <a:pPr algn="l"/>
             <a:r>
-              <a:rPr sz="1050" i="0" b="1" spc="231">
+              <a:rPr sz="1650" i="0" b="1" spc="330">
                 <a:solidFill>
                   <a:srgbClr val="F3EEE7"/>
                 </a:solidFill>
@@ -4057,7 +4057,7 @@
         </p:nvSpPr>
         <p:spPr>
           <a:xfrm>
-            <a:off x="2964359" y="16021050"/>
+            <a:off x="3875782" y="15911512"/>
             <a:ext cx="579120" cy="180975"/>
           </a:xfrm>
           <a:prstGeom prst="rect">
@@ -4092,8 +4092,8 @@
         </p:nvSpPr>
         <p:spPr>
           <a:xfrm>
-            <a:off x="-2057400" y="17306925"/>
-            <a:ext cx="14401800" cy="123825"/>
+            <a:off x="-2057400" y="17249775"/>
+            <a:ext cx="14401800" cy="180975"/>
           </a:xfrm>
           <a:prstGeom prst="rect">
             <a:avLst/>
@@ -4106,7 +4106,7 @@
           <a:p>
             <a:pPr algn="ctr"/>
             <a:r>
-              <a:rPr sz="825" i="0" b="1" spc="264">
+              <a:rPr sz="1200" i="0" b="1" spc="360">
                 <a:solidFill>
                   <a:srgbClr val="F3EEE7"/>
                 </a:solidFill>

--- a/coastal-19-listing-highlight.pptx
+++ b/coastal-19-listing-highlight.pptx
@@ -3316,7 +3316,7 @@
         </p:nvSpPr>
         <p:spPr>
           <a:xfrm>
-            <a:off x="762000" y="11639550"/>
+            <a:off x="762000" y="11744325"/>
             <a:ext cx="8763000" cy="9525"/>
           </a:xfrm>
           <a:prstGeom prst="rect">
@@ -3360,7 +3360,7 @@
         </p:nvSpPr>
         <p:spPr>
           <a:xfrm>
-            <a:off x="762000" y="12430125"/>
+            <a:off x="762000" y="12620625"/>
             <a:ext cx="8763000" cy="9525"/>
           </a:xfrm>
           <a:prstGeom prst="rect">
@@ -3404,7 +3404,7 @@
         </p:nvSpPr>
         <p:spPr>
           <a:xfrm>
-            <a:off x="762000" y="13220700"/>
+            <a:off x="762000" y="13496925"/>
             <a:ext cx="8763000" cy="9525"/>
           </a:xfrm>
           <a:prstGeom prst="rect">
@@ -3448,8 +3448,8 @@
         </p:nvSpPr>
         <p:spPr>
           <a:xfrm>
-            <a:off x="762000" y="15621000"/>
-            <a:ext cx="3570982" cy="9525"/>
+            <a:off x="762000" y="15516225"/>
+            <a:ext cx="4215705" cy="9525"/>
           </a:xfrm>
           <a:prstGeom prst="rect">
             <a:avLst/>
@@ -3493,7 +3493,7 @@
         <p:spPr>
           <a:xfrm>
             <a:off x="762000" y="16373475"/>
-            <a:ext cx="3570982" cy="9525"/>
+            <a:ext cx="4215705" cy="9525"/>
           </a:xfrm>
           <a:prstGeom prst="rect">
             <a:avLst/>
@@ -3536,8 +3536,8 @@
         </p:nvSpPr>
         <p:spPr>
           <a:xfrm>
-            <a:off x="762000" y="15621000"/>
-            <a:ext cx="9525" cy="762000"/>
+            <a:off x="762000" y="15516225"/>
+            <a:ext cx="9525" cy="866775"/>
           </a:xfrm>
           <a:prstGeom prst="rect">
             <a:avLst/>
@@ -3580,8 +3580,8 @@
         </p:nvSpPr>
         <p:spPr>
           <a:xfrm>
-            <a:off x="4323457" y="15621000"/>
-            <a:ext cx="9525" cy="762000"/>
+            <a:off x="4968180" y="15516225"/>
+            <a:ext cx="9525" cy="866775"/>
           </a:xfrm>
           <a:prstGeom prst="rect">
             <a:avLst/>
@@ -3624,7 +3624,7 @@
         </p:nvSpPr>
         <p:spPr>
           <a:xfrm>
-            <a:off x="1079593" y="15948118"/>
+            <a:off x="1117693" y="15895731"/>
             <a:ext cx="107763" cy="107763"/>
           </a:xfrm>
           <a:prstGeom prst="rect">
@@ -3707,8 +3707,8 @@
         </p:nvSpPr>
         <p:spPr>
           <a:xfrm>
-            <a:off x="5902077" y="904875"/>
-            <a:ext cx="6177677" cy="171450"/>
+            <a:off x="5425529" y="885825"/>
+            <a:ext cx="6940153" cy="209550"/>
           </a:xfrm>
           <a:prstGeom prst="rect">
             <a:avLst/>
@@ -3721,7 +3721,7 @@
           <a:p>
             <a:pPr algn="l"/>
             <a:r>
-              <a:rPr sz="1200" i="0" b="1" spc="360">
+              <a:rPr sz="1425" i="0" b="1" spc="370">
                 <a:solidFill>
                   <a:srgbClr val="F3EEE7"/>
                 </a:solidFill>
@@ -3743,7 +3743,7 @@
         <p:spPr>
           <a:xfrm>
             <a:off x="762000" y="9620250"/>
-            <a:ext cx="14401800" cy="228600"/>
+            <a:ext cx="14401800" cy="247650"/>
           </a:xfrm>
           <a:prstGeom prst="rect">
             <a:avLst/>
@@ -3756,7 +3756,7 @@
           <a:p>
             <a:pPr algn="l"/>
             <a:r>
-              <a:rPr sz="1575" i="0" b="1" spc="472">
+              <a:rPr sz="1650" i="0" b="1" spc="462">
                 <a:solidFill>
                   <a:srgbClr val="A98BA6"/>
                 </a:solidFill>
@@ -3777,7 +3777,7 @@
         </p:nvSpPr>
         <p:spPr>
           <a:xfrm>
-            <a:off x="762000" y="10001250"/>
+            <a:off x="762000" y="10020300"/>
             <a:ext cx="14401800" cy="609600"/>
           </a:xfrm>
           <a:prstGeom prst="rect">
@@ -3812,8 +3812,8 @@
         </p:nvSpPr>
         <p:spPr>
           <a:xfrm>
-            <a:off x="762000" y="11068050"/>
-            <a:ext cx="899160" cy="361950"/>
+            <a:off x="762000" y="11087100"/>
+            <a:ext cx="990600" cy="447675"/>
           </a:xfrm>
           <a:prstGeom prst="rect">
             <a:avLst/>
@@ -3826,7 +3826,7 @@
           <a:p>
             <a:pPr algn="l"/>
             <a:r>
-              <a:rPr sz="2550" i="1" b="0">
+              <a:rPr sz="3000" i="1" b="0">
                 <a:solidFill>
                   <a:srgbClr val="A98BA6"/>
                 </a:solidFill>
@@ -3847,8 +3847,8 @@
         </p:nvSpPr>
         <p:spPr>
           <a:xfrm>
-            <a:off x="1257300" y="11068050"/>
-            <a:ext cx="8706564" cy="361950"/>
+            <a:off x="1314450" y="11087100"/>
+            <a:ext cx="10787777" cy="447675"/>
           </a:xfrm>
           <a:prstGeom prst="rect">
             <a:avLst/>
@@ -3861,7 +3861,7 @@
           <a:p>
             <a:pPr algn="l"/>
             <a:r>
-              <a:rPr sz="2100" i="0" b="0">
+              <a:rPr sz="2625" i="0" b="0">
                 <a:solidFill>
                   <a:srgbClr val="F3EEE7"/>
                 </a:solidFill>
@@ -3882,8 +3882,8 @@
         </p:nvSpPr>
         <p:spPr>
           <a:xfrm>
-            <a:off x="762000" y="11858625"/>
-            <a:ext cx="899160" cy="361950"/>
+            <a:off x="762000" y="11963400"/>
+            <a:ext cx="990600" cy="447675"/>
           </a:xfrm>
           <a:prstGeom prst="rect">
             <a:avLst/>
@@ -3896,7 +3896,7 @@
           <a:p>
             <a:pPr algn="l"/>
             <a:r>
-              <a:rPr sz="2550" i="1" b="0">
+              <a:rPr sz="3000" i="1" b="0">
                 <a:solidFill>
                   <a:srgbClr val="A98BA6"/>
                 </a:solidFill>
@@ -3917,8 +3917,8 @@
         </p:nvSpPr>
         <p:spPr>
           <a:xfrm>
-            <a:off x="1257300" y="11858625"/>
-            <a:ext cx="7259241" cy="361950"/>
+            <a:off x="1314450" y="11963400"/>
+            <a:ext cx="8978741" cy="447675"/>
           </a:xfrm>
           <a:prstGeom prst="rect">
             <a:avLst/>
@@ -3931,7 +3931,7 @@
           <a:p>
             <a:pPr algn="l"/>
             <a:r>
-              <a:rPr sz="2100" i="0" b="0">
+              <a:rPr sz="2625" i="0" b="0">
                 <a:solidFill>
                   <a:srgbClr val="F3EEE7"/>
                 </a:solidFill>
@@ -3952,8 +3952,8 @@
         </p:nvSpPr>
         <p:spPr>
           <a:xfrm>
-            <a:off x="762000" y="12649200"/>
-            <a:ext cx="899160" cy="361950"/>
+            <a:off x="762000" y="12839700"/>
+            <a:ext cx="990600" cy="447675"/>
           </a:xfrm>
           <a:prstGeom prst="rect">
             <a:avLst/>
@@ -3966,7 +3966,7 @@
           <a:p>
             <a:pPr algn="l"/>
             <a:r>
-              <a:rPr sz="2550" i="1" b="0">
+              <a:rPr sz="3000" i="1" b="0">
                 <a:solidFill>
                   <a:srgbClr val="A98BA6"/>
                 </a:solidFill>
@@ -3987,8 +3987,8 @@
         </p:nvSpPr>
         <p:spPr>
           <a:xfrm>
-            <a:off x="1257300" y="12649200"/>
-            <a:ext cx="7631906" cy="361950"/>
+            <a:off x="1314450" y="12839700"/>
+            <a:ext cx="9444752" cy="447675"/>
           </a:xfrm>
           <a:prstGeom prst="rect">
             <a:avLst/>
@@ -4001,7 +4001,7 @@
           <a:p>
             <a:pPr algn="l"/>
             <a:r>
-              <a:rPr sz="2100" i="0" b="0">
+              <a:rPr sz="2625" i="0" b="0">
                 <a:solidFill>
                   <a:srgbClr val="F3EEE7"/>
                 </a:solidFill>
@@ -4022,8 +4022,8 @@
         </p:nvSpPr>
         <p:spPr>
           <a:xfrm>
-            <a:off x="1323975" y="15878175"/>
-            <a:ext cx="4220051" cy="247650"/>
+            <a:off x="1362075" y="15801975"/>
+            <a:ext cx="4977289" cy="295275"/>
           </a:xfrm>
           <a:prstGeom prst="rect">
             <a:avLst/>
@@ -4036,7 +4036,7 @@
           <a:p>
             <a:pPr algn="l"/>
             <a:r>
-              <a:rPr sz="1650" i="0" b="1" spc="330">
+              <a:rPr sz="2025" i="0" b="1" spc="364">
                 <a:solidFill>
                   <a:srgbClr val="F3EEE7"/>
                 </a:solidFill>
@@ -4057,8 +4057,8 @@
         </p:nvSpPr>
         <p:spPr>
           <a:xfrm>
-            <a:off x="3875782" y="15911512"/>
-            <a:ext cx="579120" cy="180975"/>
+            <a:off x="4387155" y="15792450"/>
+            <a:ext cx="731520" cy="314325"/>
           </a:xfrm>
           <a:prstGeom prst="rect">
             <a:avLst/>
@@ -4071,7 +4071,7 @@
           <a:p>
             <a:pPr algn="l"/>
             <a:r>
-              <a:rPr sz="1200" i="0" b="0">
+              <a:rPr sz="2100" i="0" b="0">
                 <a:solidFill>
                   <a:srgbClr val="A98BA6"/>
                 </a:solidFill>
@@ -4092,8 +4092,8 @@
         </p:nvSpPr>
         <p:spPr>
           <a:xfrm>
-            <a:off x="-2057400" y="17249775"/>
-            <a:ext cx="14401800" cy="180975"/>
+            <a:off x="-2057400" y="17211675"/>
+            <a:ext cx="14401800" cy="219075"/>
           </a:xfrm>
           <a:prstGeom prst="rect">
             <a:avLst/>
@@ -4106,7 +4106,7 @@
           <a:p>
             <a:pPr algn="ctr"/>
             <a:r>
-              <a:rPr sz="1200" i="0" b="1" spc="360">
+              <a:rPr sz="1425" i="0" b="1" spc="370">
                 <a:solidFill>
                   <a:srgbClr val="F3EEE7"/>
                 </a:solidFill>
